--- a/COMP0222_CW2_GRP_32.pptx
+++ b/COMP0222_CW2_GRP_32.pptx
@@ -3570,7 +3570,7 @@
                   <a:srgbClr val="E6EDF3"/>
                 </a:solidFill>
               </a:rPr>
-              <a:t>• Collected 3 sequences with RealSense D455</a:t>
+              <a:t>• Collected 9 sequences with RealSense D455</a:t>
             </a:r>
           </a:p>
         </p:txBody>
@@ -3604,7 +3604,7 @@
                   <a:srgbClr val="E6EDF3"/>
                 </a:solidFill>
               </a:rPr>
-              <a:t>• COLMAP calibration + SfM reconstruction</a:t>
+              <a:t>• COLMAP calibration → YAML → ORB-SLAM2</a:t>
             </a:r>
           </a:p>
         </p:txBody>
@@ -3638,7 +3638,7 @@
                   <a:srgbClr val="E6EDF3"/>
                 </a:solidFill>
               </a:rPr>
-              <a:t>• ORB-SLAM2 monocular tracking</a:t>
+              <a:t>• Basement_1: 852 poses, agree. ~83mm</a:t>
             </a:r>
           </a:p>
         </p:txBody>
@@ -3672,7 +3672,7 @@
                   <a:srgbClr val="E6EDF3"/>
                 </a:solidFill>
               </a:rPr>
-              <a:t>• EVO ATE: Basement_1 = 0.036 m (excellent)</a:t>
+              <a:t>• Outdoor_1: 584 poses, agree. ~194mm</a:t>
             </a:r>
           </a:p>
         </p:txBody>
@@ -3706,7 +3706,7 @@
                   <a:srgbClr val="E6EDF3"/>
                 </a:solidFill>
               </a:rPr>
-              <a:t>• Chirality ambiguity on Entrance2 (~178°)</a:t>
+              <a:t>• Scale disagreement explained (no metric ref)</a:t>
             </a:r>
           </a:p>
         </p:txBody>
@@ -3851,7 +3851,7 @@
                   <a:srgbClr val="E6EDF3"/>
                 </a:solidFill>
               </a:rPr>
-              <a:t>• 2-loop sequences, marked start/end</a:t>
+              <a:t>• 2-loop sequences (proximity-based lap detect)</a:t>
             </a:r>
           </a:p>
         </p:txBody>
@@ -3885,7 +3885,7 @@
                   <a:srgbClr val="E6EDF3"/>
                 </a:solidFill>
               </a:rPr>
-              <a:t>• Point-to-plane ICP + log-odds grid</a:t>
+              <a:t>• Huber-robust point-to-plane ICP</a:t>
             </a:r>
           </a:p>
         </p:txBody>
@@ -3919,7 +3919,7 @@
                   <a:srgbClr val="E6EDF3"/>
                 </a:solidFill>
               </a:rPr>
-              <a:t>• 4 parameter ablations with grid screenshots</a:t>
+              <a:t>• 4 parameter sweeps: range/angular/voxel/rate</a:t>
             </a:r>
           </a:p>
         </p:txBody>
@@ -3953,7 +3953,7 @@
                   <a:srgbClr val="E6EDF3"/>
                 </a:solidFill>
               </a:rPr>
-              <a:t>• Two-stage loop closure (pose dist + ICP)</a:t>
+              <a:t>• 4-gate loop closure (score bimodal gap at 0.70)</a:t>
             </a:r>
           </a:p>
         </p:txBody>
@@ -3987,7 +3987,7 @@
                   <a:srgbClr val="E6EDF3"/>
                 </a:solidFill>
               </a:rPr>
-              <a:t>• GTSAM factor graph reduces closure error</a:t>
+              <a:t>• GTSAM PGO: Floor7 −62%, Basement −15%</a:t>
             </a:r>
           </a:p>
         </p:txBody>
@@ -4021,7 +4021,7 @@
                   <a:srgbClr val="E6EDF3"/>
                 </a:solidFill>
               </a:rPr>
-              <a:t>• Consistent maps across both loops</a:t>
+              <a:t>• ICP Hessian correctly weights all edges</a:t>
             </a:r>
           </a:p>
         </p:txBody>
@@ -4661,7 +4661,7 @@
                   <a:srgbClr val="58A6FF"/>
                 </a:solidFill>
               </a:rPr>
-              <a:t>Data Collection</a:t>
+              <a:t>Data Collection (9 sequences)</a:t>
             </a:r>
           </a:p>
         </p:txBody>
@@ -4695,7 +4695,7 @@
                   <a:srgbClr val="E6EDF3"/>
                 </a:solidFill>
               </a:rPr>
-              <a:t>• Intel RealSense D455 camera</a:t>
+              <a:t>• Intel RealSense D455, 848×480 @ 30fps</a:t>
             </a:r>
           </a:p>
         </p:txBody>
@@ -4729,7 +4729,7 @@
                   <a:srgbClr val="E6EDF3"/>
                 </a:solidFill>
               </a:rPr>
-              <a:t>• 3 sequences (same as LiDAR)</a:t>
+              <a:t>• Auto-exposure locked after 2s warm-up</a:t>
             </a:r>
           </a:p>
         </p:txBody>
@@ -4763,7 +4763,7 @@
                   <a:srgbClr val="E6EDF3"/>
                 </a:solidFill>
               </a:rPr>
-              <a:t>• Basement_1  —  indoor</a:t>
+              <a:t>• 0.3–0.5 m/s walking pace</a:t>
             </a:r>
           </a:p>
         </p:txBody>
@@ -4797,7 +4797,7 @@
                   <a:srgbClr val="E6EDF3"/>
                 </a:solidFill>
               </a:rPr>
-              <a:t>• Floor7_Hallway  —  large indoor</a:t>
+              <a:t>• Required: ≥500 poses after ORB init</a:t>
             </a:r>
           </a:p>
         </p:txBody>
@@ -4831,7 +4831,7 @@
                   <a:srgbClr val="E6EDF3"/>
                 </a:solidFill>
               </a:rPr>
-              <a:t>• Outdoor_1  —  outdoor</a:t>
+              <a:t>• Basement_1: 852 poses  ✓  (indoor)</a:t>
             </a:r>
           </a:p>
         </p:txBody>
@@ -4865,7 +4865,7 @@
                   <a:srgbClr val="E6EDF3"/>
                 </a:solidFill>
               </a:rPr>
-              <a:t>• ≥500 frames after ORB-SLAM init</a:t>
+              <a:t>• Outdoor_1:  584 poses  ✓  (outdoor)</a:t>
             </a:r>
           </a:p>
         </p:txBody>
@@ -4942,7 +4942,7 @@
                   <a:srgbClr val="3FB950"/>
                 </a:solidFill>
               </a:rPr>
-              <a:t>Calibration &amp; Method</a:t>
+              <a:t>COLMAP Calibration</a:t>
             </a:r>
           </a:p>
         </p:txBody>
@@ -4976,7 +4976,7 @@
                   <a:srgbClr val="E6EDF3"/>
                 </a:solidFill>
               </a:rPr>
-              <a:t>• COLMAP SfM → cameras.txt intrinsics</a:t>
+              <a:t>• COLMAP SfM on each sequence</a:t>
             </a:r>
           </a:p>
         </p:txBody>
@@ -5010,7 +5010,7 @@
                   <a:srgbClr val="E6EDF3"/>
                 </a:solidFill>
               </a:rPr>
-              <a:t>• fx, fy, cx, cy, k1, k2 extracted</a:t>
+              <a:t>• OPENCV model: fx, fy, cx, cy, k1...</a:t>
             </a:r>
           </a:p>
         </p:txBody>
@@ -5044,7 +5044,7 @@
                   <a:srgbClr val="E6EDF3"/>
                 </a:solidFill>
               </a:rPr>
-              <a:t>• Applied to ORB-SLAM2 YAML config</a:t>
+              <a:t>• Basement_1 scratch: f=383.7 px</a:t>
             </a:r>
           </a:p>
         </p:txBody>
@@ -5078,7 +5078,7 @@
                   <a:srgbClr val="E6EDF3"/>
                 </a:solidFill>
               </a:rPr>
-              <a:t>• ORB-SLAM2 Monocular mode</a:t>
+              <a:t>•   (factory fx=426.7, Δ≈10%)</a:t>
             </a:r>
           </a:p>
         </p:txBody>
@@ -5112,14 +5112,48 @@
                   <a:srgbClr val="E6EDF3"/>
                 </a:solidFill>
               </a:rPr>
-              <a:t>• EVO ATE (Umeyama, correct_scale)</a:t>
-            </a:r>
-          </a:p>
-        </p:txBody>
-      </p:sp>
-      <p:sp>
-        <p:nvSpPr>
-          <p:cNvPr id="20" name="Rectangle 19"/>
+              <a:t>• Other sequences: within 0.3–1.6%</a:t>
+            </a:r>
+          </a:p>
+        </p:txBody>
+      </p:sp>
+      <p:sp>
+        <p:nvSpPr>
+          <p:cNvPr id="20" name="TextBox 19"/>
+          <p:cNvSpPr txBox="1"/>
+          <p:nvPr/>
+        </p:nvSpPr>
+        <p:spPr>
+          <a:xfrm>
+            <a:off x="4297679" y="2898648"/>
+            <a:ext cx="3566159" cy="256032"/>
+          </a:xfrm>
+          <a:prstGeom prst="rect">
+            <a:avLst/>
+          </a:prstGeom>
+          <a:noFill/>
+        </p:spPr>
+        <p:txBody>
+          <a:bodyPr wrap="square">
+            <a:spAutoFit/>
+          </a:bodyPr>
+          <a:lstStyle/>
+          <a:p>
+            <a:pPr algn="l"/>
+            <a:r>
+              <a:rPr sz="1100" b="0">
+                <a:solidFill>
+                  <a:srgbClr val="E6EDF3"/>
+                </a:solidFill>
+              </a:rPr>
+              <a:t>• Per-sequence ORB-SLAM2 YAML generated</a:t>
+            </a:r>
+          </a:p>
+        </p:txBody>
+      </p:sp>
+      <p:sp>
+        <p:nvSpPr>
+          <p:cNvPr id="21" name="Rectangle 20"/>
           <p:cNvSpPr/>
           <p:nvPr/>
         </p:nvSpPr>
@@ -5162,7 +5196,7 @@
       </p:sp>
       <p:sp>
         <p:nvSpPr>
-          <p:cNvPr id="21" name="TextBox 20"/>
+          <p:cNvPr id="22" name="TextBox 21"/>
           <p:cNvSpPr txBox="1"/>
           <p:nvPr/>
         </p:nvSpPr>
@@ -5196,7 +5230,7 @@
       </p:sp>
       <p:sp>
         <p:nvSpPr>
-          <p:cNvPr id="22" name="TextBox 21"/>
+          <p:cNvPr id="23" name="TextBox 22"/>
           <p:cNvSpPr txBox="1"/>
           <p:nvPr/>
         </p:nvSpPr>
@@ -5223,14 +5257,14 @@
                   <a:srgbClr val="E6EDF3"/>
                 </a:solidFill>
               </a:rPr>
-              <a:t>• Basement_1: ATE = 0.036 m ✓</a:t>
-            </a:r>
-          </a:p>
-        </p:txBody>
-      </p:sp>
-      <p:sp>
-        <p:nvSpPr>
-          <p:cNvPr id="23" name="TextBox 22"/>
+              <a:t>• Basement_1: inter-method agree. ~83mm</a:t>
+            </a:r>
+          </a:p>
+        </p:txBody>
+      </p:sp>
+      <p:sp>
+        <p:nvSpPr>
+          <p:cNvPr id="24" name="TextBox 23"/>
           <p:cNvSpPr txBox="1"/>
           <p:nvPr/>
         </p:nvSpPr>
@@ -5257,14 +5291,14 @@
                   <a:srgbClr val="E6EDF3"/>
                 </a:solidFill>
               </a:rPr>
-              <a:t>• Outdoor_1: ATE = 0.262 m ✓</a:t>
-            </a:r>
-          </a:p>
-        </p:txBody>
-      </p:sp>
-      <p:sp>
-        <p:nvSpPr>
-          <p:cNvPr id="24" name="TextBox 23"/>
+              <a:t>• Outdoor_1: agree. ~194mm (scale drift)</a:t>
+            </a:r>
+          </a:p>
+        </p:txBody>
+      </p:sp>
+      <p:sp>
+        <p:nvSpPr>
+          <p:cNvPr id="25" name="TextBox 24"/>
           <p:cNvSpPr txBox="1"/>
           <p:nvPr/>
         </p:nvSpPr>
@@ -5291,14 +5325,14 @@
                   <a:srgbClr val="E6EDF3"/>
                 </a:solidFill>
               </a:rPr>
-              <a:t>• Floor7: COLMAP 8 poses (no texture)</a:t>
-            </a:r>
-          </a:p>
-        </p:txBody>
-      </p:sp>
-      <p:sp>
-        <p:nvSpPr>
-          <p:cNvPr id="25" name="TextBox 24"/>
+              <a:t>• Large rot. disagreement = scale mismatch</a:t>
+            </a:r>
+          </a:p>
+        </p:txBody>
+      </p:sp>
+      <p:sp>
+        <p:nvSpPr>
+          <p:cNvPr id="26" name="TextBox 25"/>
           <p:cNvSpPr txBox="1"/>
           <p:nvPr/>
         </p:nvSpPr>
@@ -5325,14 +5359,14 @@
                   <a:srgbClr val="E6EDF3"/>
                 </a:solidFill>
               </a:rPr>
-              <a:t>• Entrance2: 178° chirality flip</a:t>
-            </a:r>
-          </a:p>
-        </p:txBody>
-      </p:sp>
-      <p:sp>
-        <p:nvSpPr>
-          <p:cNvPr id="26" name="TextBox 25"/>
+              <a:t>•   (monocular — no metric scale ref.)</a:t>
+            </a:r>
+          </a:p>
+        </p:txBody>
+      </p:sp>
+      <p:sp>
+        <p:nvSpPr>
+          <p:cNvPr id="27" name="TextBox 26"/>
           <p:cNvSpPr txBox="1"/>
           <p:nvPr/>
         </p:nvSpPr>
@@ -5359,14 +5393,48 @@
                   <a:srgbClr val="E6EDF3"/>
                 </a:solidFill>
               </a:rPr>
-              <a:t>•   (monocular ambiguity — expected)</a:t>
-            </a:r>
-          </a:p>
-        </p:txBody>
-      </p:sp>
-      <p:sp>
-        <p:nvSpPr>
-          <p:cNvPr id="27" name="Rectangle 26"/>
+              <a:t>• Floor7: COLMAP fail (featureless walls)</a:t>
+            </a:r>
+          </a:p>
+        </p:txBody>
+      </p:sp>
+      <p:sp>
+        <p:nvSpPr>
+          <p:cNvPr id="28" name="TextBox 27"/>
+          <p:cNvSpPr txBox="1"/>
+          <p:nvPr/>
+        </p:nvSpPr>
+        <p:spPr>
+          <a:xfrm>
+            <a:off x="8321040" y="2898648"/>
+            <a:ext cx="3566159" cy="256032"/>
+          </a:xfrm>
+          <a:prstGeom prst="rect">
+            <a:avLst/>
+          </a:prstGeom>
+          <a:noFill/>
+        </p:spPr>
+        <p:txBody>
+          <a:bodyPr wrap="square">
+            <a:spAutoFit/>
+          </a:bodyPr>
+          <a:lstStyle/>
+          <a:p>
+            <a:pPr algn="l"/>
+            <a:r>
+              <a:rPr sz="1100" b="0">
+                <a:solidFill>
+                  <a:srgbClr val="E6EDF3"/>
+                </a:solidFill>
+              </a:rPr>
+              <a:t>• BikeStorage2: tracking fail at night</a:t>
+            </a:r>
+          </a:p>
+        </p:txBody>
+      </p:sp>
+      <p:sp>
+        <p:nvSpPr>
+          <p:cNvPr id="29" name="Rectangle 28"/>
           <p:cNvSpPr/>
           <p:nvPr/>
         </p:nvSpPr>
@@ -5409,7 +5477,7 @@
       </p:sp>
       <p:sp>
         <p:nvSpPr>
-          <p:cNvPr id="28" name="TextBox 27"/>
+          <p:cNvPr id="30" name="TextBox 29"/>
           <p:cNvSpPr txBox="1"/>
           <p:nvPr/>
         </p:nvSpPr>
@@ -5436,14 +5504,14 @@
                   <a:srgbClr val="58A6FF"/>
                 </a:solidFill>
               </a:rPr>
-              <a:t>What We Did</a:t>
-            </a:r>
-          </a:p>
-        </p:txBody>
-      </p:sp>
-      <p:sp>
-        <p:nvSpPr>
-          <p:cNvPr id="29" name="TextBox 28"/>
+              <a:t>Method (Q2 Pipeline)</a:t>
+            </a:r>
+          </a:p>
+        </p:txBody>
+      </p:sp>
+      <p:sp>
+        <p:nvSpPr>
+          <p:cNvPr id="31" name="TextBox 30"/>
           <p:cNvSpPr txBox="1"/>
           <p:nvPr/>
         </p:nvSpPr>
@@ -5470,14 +5538,14 @@
                   <a:srgbClr val="E6EDF3"/>
                 </a:solidFill>
               </a:rPr>
-              <a:t>• • Collected 3 custom sequences covering indoor structured, large corridor, and outdoor environments</a:t>
-            </a:r>
-          </a:p>
-        </p:txBody>
-      </p:sp>
-      <p:sp>
-        <p:nvSpPr>
-          <p:cNvPr id="30" name="TextBox 29"/>
+              <a:t>• • COLMAP SfM → calibrated intrinsics → per-sequence ORB-SLAM2 YAML → calibrated ORB rerun</a:t>
+            </a:r>
+          </a:p>
+        </p:txBody>
+      </p:sp>
+      <p:sp>
+        <p:nvSpPr>
+          <p:cNvPr id="32" name="TextBox 31"/>
           <p:cNvSpPr txBox="1"/>
           <p:nvPr/>
         </p:nvSpPr>
@@ -5504,14 +5572,14 @@
                   <a:srgbClr val="E6EDF3"/>
                 </a:solidFill>
               </a:rPr>
-              <a:t>• • Ran COLMAP SfM to calibrate camera and extract 3D sparse reconstructions</a:t>
-            </a:r>
-          </a:p>
-        </p:txBody>
-      </p:sp>
-      <p:sp>
-        <p:nvSpPr>
-          <p:cNvPr id="31" name="TextBox 30"/>
+              <a:t>• • EVO APE with Umeyama SE(3)+scale correction: measures inter-method agreement (no ground truth)</a:t>
+            </a:r>
+          </a:p>
+        </p:txBody>
+      </p:sp>
+      <p:sp>
+        <p:nvSpPr>
+          <p:cNvPr id="33" name="TextBox 32"/>
           <p:cNvSpPr txBox="1"/>
           <p:nvPr/>
         </p:nvSpPr>
@@ -5538,14 +5606,14 @@
                   <a:srgbClr val="E6EDF3"/>
                 </a:solidFill>
               </a:rPr>
-              <a:t>• • Ran ORB-SLAM2 monocular with COLMAP intrinsics and compared trajectories using EVO ATE</a:t>
-            </a:r>
-          </a:p>
-        </p:txBody>
-      </p:sp>
-      <p:sp>
-        <p:nvSpPr>
-          <p:cNvPr id="32" name="TextBox 31"/>
+              <a:t>• • "ATE" reported = COLMAP-vs-ORB disagreement, not accuracy against truth</a:t>
+            </a:r>
+          </a:p>
+        </p:txBody>
+      </p:sp>
+      <p:sp>
+        <p:nvSpPr>
+          <p:cNvPr id="34" name="TextBox 33"/>
           <p:cNvSpPr txBox="1"/>
           <p:nvPr/>
         </p:nvSpPr>
@@ -5572,7 +5640,7 @@
                   <a:srgbClr val="E6EDF3"/>
                 </a:solidFill>
               </a:rPr>
-              <a:t>• • Floor7_Hallway: COLMAP near-failure (featureless corridor).  Entrance2: ~178° orientation divergence (chirality ambiguity).</a:t>
+              <a:t>• • Scale-normalised RMSE (m/m) used for cross-sequence comparison</a:t>
             </a:r>
           </a:p>
         </p:txBody>
@@ -5731,47 +5799,23 @@
         <p:spPr>
           <a:xfrm>
             <a:off x="182880" y="1188720"/>
-            <a:ext cx="7498079" cy="5303520"/>
+            <a:ext cx="7772400" cy="5303520"/>
           </a:xfrm>
           <a:prstGeom prst="rect">
             <a:avLst/>
           </a:prstGeom>
         </p:spPr>
       </p:pic>
-      <p:pic>
-        <p:nvPicPr>
-          <p:cNvPr id="6" name="Picture 5" descr="q2b_summary_table.png"/>
-          <p:cNvPicPr>
-            <a:picLocks noChangeAspect="1"/>
-          </p:cNvPicPr>
-          <p:nvPr/>
-        </p:nvPicPr>
-        <p:blipFill>
-          <a:blip r:embed="rId3"/>
-          <a:stretch>
-            <a:fillRect/>
-          </a:stretch>
-        </p:blipFill>
-        <p:spPr>
-          <a:xfrm>
-            <a:off x="7863840" y="1188720"/>
-            <a:ext cx="4114800" cy="2377440"/>
-          </a:xfrm>
-          <a:prstGeom prst="rect">
-            <a:avLst/>
-          </a:prstGeom>
-        </p:spPr>
-      </p:pic>
-      <p:sp>
-        <p:nvSpPr>
-          <p:cNvPr id="7" name="Rectangle 6"/>
+      <p:sp>
+        <p:nvSpPr>
+          <p:cNvPr id="6" name="Rectangle 5"/>
           <p:cNvSpPr/>
           <p:nvPr/>
         </p:nvSpPr>
         <p:spPr>
           <a:xfrm>
-            <a:off x="7863840" y="3749039"/>
-            <a:ext cx="4114800" cy="2743200"/>
+            <a:off x="8138160" y="1188720"/>
+            <a:ext cx="3840480" cy="5303520"/>
           </a:xfrm>
           <a:prstGeom prst="rect">
             <a:avLst/>
@@ -5807,34 +5851,68 @@
       </p:sp>
       <p:sp>
         <p:nvSpPr>
+          <p:cNvPr id="7" name="TextBox 6"/>
+          <p:cNvSpPr txBox="1"/>
+          <p:nvPr/>
+        </p:nvSpPr>
+        <p:spPr>
+          <a:xfrm>
+            <a:off x="8229600" y="1261872"/>
+            <a:ext cx="3657600" cy="274320"/>
+          </a:xfrm>
+          <a:prstGeom prst="rect">
+            <a:avLst/>
+          </a:prstGeom>
+          <a:noFill/>
+        </p:spPr>
+        <p:txBody>
+          <a:bodyPr wrap="square">
+            <a:spAutoFit/>
+          </a:bodyPr>
+          <a:lstStyle/>
+          <a:p>
+            <a:pPr algn="l"/>
+            <a:r>
+              <a:rPr sz="1300" b="1">
+                <a:solidFill>
+                  <a:srgbClr val="58A6FF"/>
+                </a:solidFill>
+              </a:rPr>
+              <a:t>Interpretation</a:t>
+            </a:r>
+          </a:p>
+        </p:txBody>
+      </p:sp>
+      <p:sp>
+        <p:nvSpPr>
           <p:cNvPr id="8" name="TextBox 7"/>
           <p:cNvSpPr txBox="1"/>
           <p:nvPr/>
         </p:nvSpPr>
         <p:spPr>
           <a:xfrm>
-            <a:off x="7955279" y="3822191"/>
-            <a:ext cx="3931920" cy="274320"/>
-          </a:xfrm>
-          <a:prstGeom prst="rect">
-            <a:avLst/>
-          </a:prstGeom>
-          <a:noFill/>
-        </p:spPr>
-        <p:txBody>
-          <a:bodyPr wrap="square">
-            <a:spAutoFit/>
-          </a:bodyPr>
-          <a:lstStyle/>
-          <a:p>
-            <a:pPr algn="l"/>
-            <a:r>
-              <a:rPr sz="1300" b="1">
-                <a:solidFill>
-                  <a:srgbClr val="58A6FF"/>
-                </a:solidFill>
-              </a:rPr>
-              <a:t>Interpretation</a:t>
+            <a:off x="8229600" y="1572768"/>
+            <a:ext cx="3657600" cy="256032"/>
+          </a:xfrm>
+          <a:prstGeom prst="rect">
+            <a:avLst/>
+          </a:prstGeom>
+          <a:noFill/>
+        </p:spPr>
+        <p:txBody>
+          <a:bodyPr wrap="square">
+            <a:spAutoFit/>
+          </a:bodyPr>
+          <a:lstStyle/>
+          <a:p>
+            <a:pPr algn="l"/>
+            <a:r>
+              <a:rPr sz="1000" b="0">
+                <a:solidFill>
+                  <a:srgbClr val="E6EDF3"/>
+                </a:solidFill>
+              </a:rPr>
+              <a:t>• Basement_1: 83mm — very good</a:t>
             </a:r>
           </a:p>
         </p:txBody>
@@ -5847,8 +5925,8 @@
         </p:nvSpPr>
         <p:spPr>
           <a:xfrm>
-            <a:off x="7955279" y="4133087"/>
-            <a:ext cx="3931920" cy="256032"/>
+            <a:off x="8229600" y="1828800"/>
+            <a:ext cx="3657600" cy="256032"/>
           </a:xfrm>
           <a:prstGeom prst="rect">
             <a:avLst/>
@@ -5868,7 +5946,7 @@
                   <a:srgbClr val="E6EDF3"/>
                 </a:solidFill>
               </a:rPr>
-              <a:t>• Basement_1: 0.036 m — very close</a:t>
+              <a:t>• Outdoor_1: 194mm — scale ambiguity</a:t>
             </a:r>
           </a:p>
         </p:txBody>
@@ -5881,8 +5959,8 @@
         </p:nvSpPr>
         <p:spPr>
           <a:xfrm>
-            <a:off x="7955279" y="4389120"/>
-            <a:ext cx="3931920" cy="256032"/>
+            <a:off x="8229600" y="2084832"/>
+            <a:ext cx="3657600" cy="256032"/>
           </a:xfrm>
           <a:prstGeom prst="rect">
             <a:avLst/>
@@ -5902,7 +5980,7 @@
                   <a:srgbClr val="E6EDF3"/>
                 </a:solidFill>
               </a:rPr>
-              <a:t>• Outdoor_1: 0.262 m — acceptable</a:t>
+              <a:t>• OnePoolStreet1: large rot. disagreement</a:t>
             </a:r>
           </a:p>
         </p:txBody>
@@ -5915,8 +5993,8 @@
         </p:nvSpPr>
         <p:spPr>
           <a:xfrm>
-            <a:off x="7955279" y="4645152"/>
-            <a:ext cx="3931920" cy="256032"/>
+            <a:off x="8229600" y="2340864"/>
+            <a:ext cx="3657600" cy="256032"/>
           </a:xfrm>
           <a:prstGeom prst="rect">
             <a:avLst/>
@@ -5936,7 +6014,7 @@
                   <a:srgbClr val="E6EDF3"/>
                 </a:solidFill>
               </a:rPr>
-              <a:t>• OnePoolStreet1: 3.0 m — scale drift</a:t>
+              <a:t>•   → scale mismatch after Sim(3) align</a:t>
             </a:r>
           </a:p>
         </p:txBody>
@@ -5949,8 +6027,8 @@
         </p:nvSpPr>
         <p:spPr>
           <a:xfrm>
-            <a:off x="7955279" y="4901183"/>
-            <a:ext cx="3931920" cy="256032"/>
+            <a:off x="8229600" y="2596896"/>
+            <a:ext cx="3657600" cy="256032"/>
           </a:xfrm>
           <a:prstGeom prst="rect">
             <a:avLst/>
@@ -5970,7 +6048,7 @@
                   <a:srgbClr val="E6EDF3"/>
                 </a:solidFill>
               </a:rPr>
-              <a:t>• Entrance2: rot=178° — chirality flip</a:t>
+              <a:t>• Floor7: COLMAP fail (featureless)</a:t>
             </a:r>
           </a:p>
         </p:txBody>
@@ -5983,8 +6061,8 @@
         </p:nvSpPr>
         <p:spPr>
           <a:xfrm>
-            <a:off x="7955279" y="5157216"/>
-            <a:ext cx="3931920" cy="256032"/>
+            <a:off x="8229600" y="2852928"/>
+            <a:ext cx="3657600" cy="256032"/>
           </a:xfrm>
           <a:prstGeom prst="rect">
             <a:avLst/>
@@ -6004,7 +6082,143 @@
                   <a:srgbClr val="E6EDF3"/>
                 </a:solidFill>
               </a:rPr>
-              <a:t>• Floor7: 0 matched poses (COLMAP fail)</a:t>
+              <a:t>• </a:t>
+            </a:r>
+          </a:p>
+        </p:txBody>
+      </p:sp>
+      <p:sp>
+        <p:nvSpPr>
+          <p:cNvPr id="14" name="TextBox 13"/>
+          <p:cNvSpPr txBox="1"/>
+          <p:nvPr/>
+        </p:nvSpPr>
+        <p:spPr>
+          <a:xfrm>
+            <a:off x="8229600" y="3108960"/>
+            <a:ext cx="3657600" cy="256032"/>
+          </a:xfrm>
+          <a:prstGeom prst="rect">
+            <a:avLst/>
+          </a:prstGeom>
+          <a:noFill/>
+        </p:spPr>
+        <p:txBody>
+          <a:bodyPr wrap="square">
+            <a:spAutoFit/>
+          </a:bodyPr>
+          <a:lstStyle/>
+          <a:p>
+            <a:pPr algn="l"/>
+            <a:r>
+              <a:rPr sz="1000" b="0">
+                <a:solidFill>
+                  <a:srgbClr val="E6EDF3"/>
+                </a:solidFill>
+              </a:rPr>
+              <a:t>• NOTE: "ATE" = inter-method agreement.</a:t>
+            </a:r>
+          </a:p>
+        </p:txBody>
+      </p:sp>
+      <p:sp>
+        <p:nvSpPr>
+          <p:cNvPr id="15" name="TextBox 14"/>
+          <p:cNvSpPr txBox="1"/>
+          <p:nvPr/>
+        </p:nvSpPr>
+        <p:spPr>
+          <a:xfrm>
+            <a:off x="8229600" y="3364992"/>
+            <a:ext cx="3657600" cy="256032"/>
+          </a:xfrm>
+          <a:prstGeom prst="rect">
+            <a:avLst/>
+          </a:prstGeom>
+          <a:noFill/>
+        </p:spPr>
+        <p:txBody>
+          <a:bodyPr wrap="square">
+            <a:spAutoFit/>
+          </a:bodyPr>
+          <a:lstStyle/>
+          <a:p>
+            <a:pPr algn="l"/>
+            <a:r>
+              <a:rPr sz="1000" b="0">
+                <a:solidFill>
+                  <a:srgbClr val="E6EDF3"/>
+                </a:solidFill>
+              </a:rPr>
+              <a:t>• No external ground truth available.</a:t>
+            </a:r>
+          </a:p>
+        </p:txBody>
+      </p:sp>
+      <p:sp>
+        <p:nvSpPr>
+          <p:cNvPr id="16" name="TextBox 15"/>
+          <p:cNvSpPr txBox="1"/>
+          <p:nvPr/>
+        </p:nvSpPr>
+        <p:spPr>
+          <a:xfrm>
+            <a:off x="8229600" y="3621024"/>
+            <a:ext cx="3657600" cy="256032"/>
+          </a:xfrm>
+          <a:prstGeom prst="rect">
+            <a:avLst/>
+          </a:prstGeom>
+          <a:noFill/>
+        </p:spPr>
+        <p:txBody>
+          <a:bodyPr wrap="square">
+            <a:spAutoFit/>
+          </a:bodyPr>
+          <a:lstStyle/>
+          <a:p>
+            <a:pPr algn="l"/>
+            <a:r>
+              <a:rPr sz="1000" b="0">
+                <a:solidFill>
+                  <a:srgbClr val="E6EDF3"/>
+                </a:solidFill>
+              </a:rPr>
+              <a:t>• Large rotation ≠ broken trajectory.</a:t>
+            </a:r>
+          </a:p>
+        </p:txBody>
+      </p:sp>
+      <p:sp>
+        <p:nvSpPr>
+          <p:cNvPr id="17" name="TextBox 16"/>
+          <p:cNvSpPr txBox="1"/>
+          <p:nvPr/>
+        </p:nvSpPr>
+        <p:spPr>
+          <a:xfrm>
+            <a:off x="8229600" y="3877056"/>
+            <a:ext cx="3657600" cy="256032"/>
+          </a:xfrm>
+          <a:prstGeom prst="rect">
+            <a:avLst/>
+          </a:prstGeom>
+          <a:noFill/>
+        </p:spPr>
+        <p:txBody>
+          <a:bodyPr wrap="square">
+            <a:spAutoFit/>
+          </a:bodyPr>
+          <a:lstStyle/>
+          <a:p>
+            <a:pPr algn="l"/>
+            <a:r>
+              <a:rPr sz="1000" b="0">
+                <a:solidFill>
+                  <a:srgbClr val="E6EDF3"/>
+                </a:solidFill>
+              </a:rPr>
+              <a:t>• Both methods are internally consistent.</a:t>
             </a:r>
           </a:p>
         </p:txBody>
@@ -6529,7 +6743,7 @@
                   <a:srgbClr val="E6EDF3"/>
                 </a:solidFill>
               </a:rPr>
-              <a:t>• RPLidar A1M8 (max range 8000 mm)</a:t>
+              <a:t>• RPLidar A2M12 (max range 12000 mm)</a:t>
             </a:r>
           </a:p>
         </p:txBody>
@@ -6810,7 +7024,7 @@
                   <a:srgbClr val="E6EDF3"/>
                 </a:solidFill>
               </a:rPr>
-              <a:t>• Point-to-plane ICP (linearised)</a:t>
+              <a:t>• Huber-robust point-to-plane ICP</a:t>
             </a:r>
           </a:p>
         </p:txBody>
@@ -6878,7 +7092,7 @@
                   <a:srgbClr val="E6EDF3"/>
                 </a:solidFill>
               </a:rPr>
-              <a:t>• Bresenham ray-casting</a:t>
+              <a:t>• Bresenham ray-casting (unbounded)</a:t>
             </a:r>
           </a:p>
         </p:txBody>
@@ -6980,7 +7194,7 @@
                   <a:srgbClr val="E6EDF3"/>
                 </a:solidFill>
               </a:rPr>
-              <a:t>•   (&gt;2 m or &gt;45° rejected)</a:t>
+              <a:t>•   (&gt;0.5 m or &gt;25° rejected)</a:t>
             </a:r>
           </a:p>
         </p:txBody>
@@ -7091,7 +7305,7 @@
                   <a:srgbClr val="E6EDF3"/>
                 </a:solidFill>
               </a:rPr>
-              <a:t>• Two-stage filter:</a:t>
+              <a:t>• Multi-stage gating:</a:t>
             </a:r>
           </a:p>
         </p:txBody>
@@ -7125,7 +7339,7 @@
                   <a:srgbClr val="E6EDF3"/>
                 </a:solidFill>
               </a:rPr>
-              <a:t>•   1. Pose distance &lt; 2.0 m</a:t>
+              <a:t>•   1. Temporal separation ≥ 10 KF</a:t>
             </a:r>
           </a:p>
         </p:txBody>
@@ -7159,7 +7373,7 @@
                   <a:srgbClr val="E6EDF3"/>
                 </a:solidFill>
               </a:rPr>
-              <a:t>•   2. ICP match score ≥ 0.55</a:t>
+              <a:t>•   2. Adaptive arc-length gate</a:t>
             </a:r>
           </a:p>
         </p:txBody>
@@ -7193,7 +7407,7 @@
                   <a:srgbClr val="E6EDF3"/>
                 </a:solidFill>
               </a:rPr>
-              <a:t>• GTSAM Levenberg-Marquardt</a:t>
+              <a:t>•   3. Pose distance &lt; 2.0 m</a:t>
             </a:r>
           </a:p>
         </p:txBody>
@@ -7227,7 +7441,7 @@
                   <a:srgbClr val="E6EDF3"/>
                 </a:solidFill>
               </a:rPr>
-              <a:t>• Odometry edges (ω=100)</a:t>
+              <a:t>•   4. ICP match score ≥ 0.70</a:t>
             </a:r>
           </a:p>
         </p:txBody>
@@ -7261,14 +7475,82 @@
                   <a:srgbClr val="E6EDF3"/>
                 </a:solidFill>
               </a:rPr>
-              <a:t>• Loop closure edges (ω=500)</a:t>
-            </a:r>
-          </a:p>
-        </p:txBody>
-      </p:sp>
-      <p:sp>
-        <p:nvSpPr>
-          <p:cNvPr id="29" name="Rectangle 28"/>
+              <a:t>• GTSAM Levenberg-Marquardt</a:t>
+            </a:r>
+          </a:p>
+        </p:txBody>
+      </p:sp>
+      <p:sp>
+        <p:nvSpPr>
+          <p:cNvPr id="29" name="TextBox 28"/>
+          <p:cNvSpPr txBox="1"/>
+          <p:nvPr/>
+        </p:nvSpPr>
+        <p:spPr>
+          <a:xfrm>
+            <a:off x="8321040" y="3154680"/>
+            <a:ext cx="3566159" cy="256032"/>
+          </a:xfrm>
+          <a:prstGeom prst="rect">
+            <a:avLst/>
+          </a:prstGeom>
+          <a:noFill/>
+        </p:spPr>
+        <p:txBody>
+          <a:bodyPr wrap="square">
+            <a:spAutoFit/>
+          </a:bodyPr>
+          <a:lstStyle/>
+          <a:p>
+            <a:pPr algn="l"/>
+            <a:r>
+              <a:rPr sz="1100" b="0">
+                <a:solidFill>
+                  <a:srgbClr val="E6EDF3"/>
+                </a:solidFill>
+              </a:rPr>
+              <a:t>• Per-edge 3×3 info (ICP Hessian)</a:t>
+            </a:r>
+          </a:p>
+        </p:txBody>
+      </p:sp>
+      <p:sp>
+        <p:nvSpPr>
+          <p:cNvPr id="30" name="TextBox 29"/>
+          <p:cNvSpPr txBox="1"/>
+          <p:nvPr/>
+        </p:nvSpPr>
+        <p:spPr>
+          <a:xfrm>
+            <a:off x="8321040" y="3410712"/>
+            <a:ext cx="3566159" cy="256032"/>
+          </a:xfrm>
+          <a:prstGeom prst="rect">
+            <a:avLst/>
+          </a:prstGeom>
+          <a:noFill/>
+        </p:spPr>
+        <p:txBody>
+          <a:bodyPr wrap="square">
+            <a:spAutoFit/>
+          </a:bodyPr>
+          <a:lstStyle/>
+          <a:p>
+            <a:pPr algn="l"/>
+            <a:r>
+              <a:rPr sz="1100" b="0">
+                <a:solidFill>
+                  <a:srgbClr val="E6EDF3"/>
+                </a:solidFill>
+              </a:rPr>
+              <a:t>• Loop info tighter than odometry</a:t>
+            </a:r>
+          </a:p>
+        </p:txBody>
+      </p:sp>
+      <p:sp>
+        <p:nvSpPr>
+          <p:cNvPr id="31" name="Rectangle 30"/>
           <p:cNvSpPr/>
           <p:nvPr/>
         </p:nvSpPr>
@@ -7311,7 +7593,7 @@
       </p:sp>
       <p:sp>
         <p:nvSpPr>
-          <p:cNvPr id="30" name="TextBox 29"/>
+          <p:cNvPr id="32" name="TextBox 31"/>
           <p:cNvSpPr txBox="1"/>
           <p:nvPr/>
         </p:nvSpPr>
@@ -7345,7 +7627,7 @@
       </p:sp>
       <p:sp>
         <p:nvSpPr>
-          <p:cNvPr id="31" name="TextBox 30"/>
+          <p:cNvPr id="33" name="TextBox 32"/>
           <p:cNvSpPr txBox="1"/>
           <p:nvPr/>
         </p:nvSpPr>
@@ -7372,14 +7654,14 @@
                   <a:srgbClr val="E6EDF3"/>
                 </a:solidFill>
               </a:rPr>
-              <a:t>• ① Max range: 2000 mm vs 8000 mm (sensor max)   ② Angular resolution: full / every 2nd / every 3rd beam</a:t>
-            </a:r>
-          </a:p>
-        </p:txBody>
-      </p:sp>
-      <p:sp>
-        <p:nvSpPr>
-          <p:cNvPr id="32" name="TextBox 31"/>
+              <a:t>• ① Max range: 2000 mm vs 12000 mm (sensor max)   ② Angular resolution: full / every 2nd / every 3rd beam</a:t>
+            </a:r>
+          </a:p>
+        </p:txBody>
+      </p:sp>
+      <p:sp>
+        <p:nvSpPr>
+          <p:cNvPr id="34" name="TextBox 33"/>
           <p:cNvSpPr txBox="1"/>
           <p:nvPr/>
         </p:nvSpPr>
@@ -7413,7 +7695,7 @@
       </p:sp>
       <p:sp>
         <p:nvSpPr>
-          <p:cNvPr id="33" name="TextBox 32"/>
+          <p:cNvPr id="35" name="TextBox 34"/>
           <p:cNvSpPr txBox="1"/>
           <p:nvPr/>
         </p:nvSpPr>
@@ -7746,7 +8028,7 @@
                   <a:srgbClr val="E6EDF3"/>
                 </a:solidFill>
               </a:rPr>
-              <a:t>• Range 8000mm: complete map</a:t>
+              <a:t>• Range 12000mm: complete map</a:t>
             </a:r>
           </a:p>
         </p:txBody>
@@ -8315,7 +8597,7 @@
                   <a:srgbClr val="8B949E"/>
                 </a:solidFill>
               </a:rPr>
-              <a:t>Max Range (2000 vs 8000 mm)</a:t>
+              <a:t>Max Range (2000 vs 12000 mm)</a:t>
             </a:r>
           </a:p>
         </p:txBody>
@@ -9106,7 +9388,7 @@
                   <a:srgbClr val="E6EDF3"/>
                 </a:solidFill>
               </a:rPr>
-              <a:t>• • Odometry edges between consecutive keyframes (information weight ω=100)</a:t>
+              <a:t>• • Odometry edges: per-edge 3×3 info matrix from ICP Hessian (scaled by inlier count) + diagonal regulariser</a:t>
             </a:r>
           </a:p>
         </p:txBody>
@@ -9140,7 +9422,7 @@
                   <a:srgbClr val="E6EDF3"/>
                 </a:solidFill>
               </a:rPr>
-              <a:t>• • Loop closure edges from confirmed detections (ω=500, higher trust)</a:t>
+              <a:t>• • Loop edges: per-loop ICP Hessian propagated from loop-detection ICP (not fixed sigma — correctly weighted)</a:t>
             </a:r>
           </a:p>
         </p:txBody>
@@ -9174,7 +9456,7 @@
                   <a:srgbClr val="E6EDF3"/>
                 </a:solidFill>
               </a:rPr>
-              <a:t>• • Anchor prior on pose 0 fixes global frame.  Closure error = Euclidean distance from start to end pose.</a:t>
+              <a:t>• • GTSAM LM, 200 iter, rel.tol=1e-8.  Closure error = Euclidean distance start→end (before vs after).</a:t>
             </a:r>
           </a:p>
         </p:txBody>
